--- a/materials/lectures/04-expected_time/slides.pptx
+++ b/materials/lectures/04-expected_time/slides.pptx
@@ -7,7 +7,7 @@
     <p:sldMasterId id="2147483668" r:id="rId3"/>
   </p:sldMasterIdLst>
   <p:notesMasterIdLst>
-    <p:notesMasterId r:id="rId28"/>
+    <p:notesMasterId r:id="rId31"/>
   </p:notesMasterIdLst>
   <p:sldIdLst>
     <p:sldId id="256" r:id="rId4"/>
@@ -17,71 +17,55 @@
     <p:sldId id="813" r:id="rId8"/>
     <p:sldId id="814" r:id="rId9"/>
     <p:sldId id="815" r:id="rId10"/>
-    <p:sldId id="816" r:id="rId11"/>
-    <p:sldId id="785" r:id="rId12"/>
-    <p:sldId id="831" r:id="rId13"/>
-    <p:sldId id="817" r:id="rId14"/>
-    <p:sldId id="818" r:id="rId15"/>
-    <p:sldId id="819" r:id="rId16"/>
-    <p:sldId id="820" r:id="rId17"/>
-    <p:sldId id="821" r:id="rId18"/>
-    <p:sldId id="822" r:id="rId19"/>
-    <p:sldId id="823" r:id="rId20"/>
-    <p:sldId id="824" r:id="rId21"/>
-    <p:sldId id="825" r:id="rId22"/>
-    <p:sldId id="826" r:id="rId23"/>
-    <p:sldId id="827" r:id="rId24"/>
-    <p:sldId id="828" r:id="rId25"/>
-    <p:sldId id="829" r:id="rId26"/>
-    <p:sldId id="811" r:id="rId27"/>
+    <p:sldId id="833" r:id="rId11"/>
+    <p:sldId id="816" r:id="rId12"/>
+    <p:sldId id="785" r:id="rId13"/>
+    <p:sldId id="831" r:id="rId14"/>
+    <p:sldId id="834" r:id="rId15"/>
+    <p:sldId id="817" r:id="rId16"/>
+    <p:sldId id="835" r:id="rId17"/>
+    <p:sldId id="818" r:id="rId18"/>
+    <p:sldId id="819" r:id="rId19"/>
+    <p:sldId id="820" r:id="rId20"/>
+    <p:sldId id="821" r:id="rId21"/>
+    <p:sldId id="822" r:id="rId22"/>
+    <p:sldId id="823" r:id="rId23"/>
+    <p:sldId id="824" r:id="rId24"/>
+    <p:sldId id="825" r:id="rId25"/>
+    <p:sldId id="826" r:id="rId26"/>
+    <p:sldId id="827" r:id="rId27"/>
+    <p:sldId id="828" r:id="rId28"/>
+    <p:sldId id="829" r:id="rId29"/>
+    <p:sldId id="811" r:id="rId30"/>
   </p:sldIdLst>
   <p:sldSz cx="12192000" cy="6858000"/>
   <p:notesSz cx="6858000" cy="9144000"/>
   <p:embeddedFontLst>
     <p:embeddedFont>
       <p:font typeface="Bookman Old Style" panose="02050604050505020204" pitchFamily="18" charset="0"/>
-      <p:regular r:id="rId29"/>
-      <p:bold r:id="rId30"/>
-      <p:italic r:id="rId31"/>
-      <p:boldItalic r:id="rId32"/>
-    </p:embeddedFont>
-    <p:embeddedFont>
-      <p:font typeface="Calibri" panose="020F0502020204030204" pitchFamily="34" charset="0"/>
-      <p:regular r:id="rId33"/>
-      <p:bold r:id="rId34"/>
-      <p:italic r:id="rId35"/>
-      <p:boldItalic r:id="rId36"/>
-    </p:embeddedFont>
-    <p:embeddedFont>
-      <p:font typeface="Calibri Light" panose="020F0302020204030204" pitchFamily="34" charset="0"/>
-      <p:regular r:id="rId37"/>
-      <p:italic r:id="rId38"/>
+      <p:regular r:id="rId32"/>
+      <p:bold r:id="rId33"/>
+      <p:italic r:id="rId34"/>
+      <p:boldItalic r:id="rId35"/>
     </p:embeddedFont>
     <p:embeddedFont>
       <p:font typeface="Cambria Math" panose="02040503050406030204" pitchFamily="18" charset="0"/>
-      <p:regular r:id="rId39"/>
+      <p:regular r:id="rId36"/>
     </p:embeddedFont>
     <p:embeddedFont>
       <p:font typeface="Gill Sans MT" panose="020B0502020104020203" pitchFamily="34" charset="0"/>
-      <p:regular r:id="rId40"/>
-      <p:bold r:id="rId41"/>
-      <p:italic r:id="rId42"/>
-      <p:boldItalic r:id="rId43"/>
-    </p:embeddedFont>
-    <p:embeddedFont>
-      <p:font typeface="Times" panose="02020603050405020304" pitchFamily="18" charset="0"/>
-      <p:regular r:id="rId44"/>
-      <p:bold r:id="rId45"/>
-      <p:italic r:id="rId46"/>
-      <p:boldItalic r:id="rId47"/>
+      <p:regular r:id="rId37"/>
+      <p:bold r:id="rId38"/>
+      <p:italic r:id="rId39"/>
+      <p:boldItalic r:id="rId40"/>
     </p:embeddedFont>
     <p:embeddedFont>
       <p:font typeface="Wingdings 3" panose="05040102010807070707" pitchFamily="18" charset="2"/>
-      <p:regular r:id="rId48"/>
+      <p:regular r:id="rId41"/>
     </p:embeddedFont>
   </p:embeddedFontLst>
   <p:custDataLst>
-    <p:tags r:id="rId49"/>
+    <p:tags r:id="rId42"/>
   </p:custDataLst>
   <p:defaultTextStyle>
     <a:defPPr>
@@ -334,7 +318,7 @@
               <a:pPr>
                 <a:defRPr/>
               </a:pPr>
-              <a:t>10/1/2021</a:t>
+              <a:t>1/12/2025</a:t>
             </a:fld>
             <a:endParaRPr lang="en-US"/>
           </a:p>
@@ -730,7 +714,7 @@
               <a:pPr>
                 <a:defRPr/>
               </a:pPr>
-              <a:t>10</a:t>
+              <a:t>11</a:t>
             </a:fld>
             <a:endParaRPr lang="en-US"/>
           </a:p>
@@ -828,7 +812,7 @@
               <a:pPr>
                 <a:defRPr/>
               </a:pPr>
-              <a:t>11</a:t>
+              <a:t>13</a:t>
             </a:fld>
             <a:endParaRPr lang="en-US"/>
           </a:p>
@@ -1210,7 +1194,7 @@
               <a:pPr>
                 <a:defRPr/>
               </a:pPr>
-              <a:t>10/1/2021</a:t>
+              <a:t>1/12/2025</a:t>
             </a:fld>
             <a:endParaRPr lang="en-US"/>
           </a:p>
@@ -1454,7 +1438,7 @@
           <a:p>
             <a:fld id="{344494C4-6097-4BA9-B81C-8FE8D10E85BA}" type="datetimeFigureOut">
               <a:rPr lang="en-US" smtClean="0"/>
-              <a:t>10/1/2021</a:t>
+              <a:t>1/12/2025</a:t>
             </a:fld>
             <a:endParaRPr lang="en-US"/>
           </a:p>
@@ -1699,7 +1683,7 @@
           <a:p>
             <a:fld id="{344494C4-6097-4BA9-B81C-8FE8D10E85BA}" type="datetimeFigureOut">
               <a:rPr lang="en-US" smtClean="0"/>
-              <a:t>10/1/2021</a:t>
+              <a:t>1/12/2025</a:t>
             </a:fld>
             <a:endParaRPr lang="en-US"/>
           </a:p>
@@ -2079,7 +2063,7 @@
           <a:p>
             <a:fld id="{344494C4-6097-4BA9-B81C-8FE8D10E85BA}" type="datetimeFigureOut">
               <a:rPr lang="en-US" smtClean="0"/>
-              <a:t>10/1/2021</a:t>
+              <a:t>1/12/2025</a:t>
             </a:fld>
             <a:endParaRPr lang="en-US"/>
           </a:p>
@@ -2212,7 +2196,7 @@
           <a:p>
             <a:fld id="{344494C4-6097-4BA9-B81C-8FE8D10E85BA}" type="datetimeFigureOut">
               <a:rPr lang="en-US" smtClean="0"/>
-              <a:t>10/1/2021</a:t>
+              <a:t>1/12/2025</a:t>
             </a:fld>
             <a:endParaRPr lang="en-US"/>
           </a:p>
@@ -2323,7 +2307,7 @@
           <a:p>
             <a:fld id="{344494C4-6097-4BA9-B81C-8FE8D10E85BA}" type="datetimeFigureOut">
               <a:rPr lang="en-US" smtClean="0"/>
-              <a:t>10/1/2021</a:t>
+              <a:t>1/12/2025</a:t>
             </a:fld>
             <a:endParaRPr lang="en-US"/>
           </a:p>
@@ -2614,7 +2598,7 @@
           <a:p>
             <a:fld id="{344494C4-6097-4BA9-B81C-8FE8D10E85BA}" type="datetimeFigureOut">
               <a:rPr lang="en-US" smtClean="0"/>
-              <a:t>10/1/2021</a:t>
+              <a:t>1/12/2025</a:t>
             </a:fld>
             <a:endParaRPr lang="en-US"/>
           </a:p>
@@ -2882,7 +2866,7 @@
           <a:p>
             <a:fld id="{344494C4-6097-4BA9-B81C-8FE8D10E85BA}" type="datetimeFigureOut">
               <a:rPr lang="en-US" smtClean="0"/>
-              <a:t>10/1/2021</a:t>
+              <a:t>1/12/2025</a:t>
             </a:fld>
             <a:endParaRPr lang="en-US"/>
           </a:p>
@@ -3066,7 +3050,7 @@
           <a:p>
             <a:fld id="{344494C4-6097-4BA9-B81C-8FE8D10E85BA}" type="datetimeFigureOut">
               <a:rPr lang="en-US" smtClean="0"/>
-              <a:t>10/1/2021</a:t>
+              <a:t>1/12/2025</a:t>
             </a:fld>
             <a:endParaRPr lang="en-US"/>
           </a:p>
@@ -3260,7 +3244,7 @@
           <a:p>
             <a:fld id="{344494C4-6097-4BA9-B81C-8FE8D10E85BA}" type="datetimeFigureOut">
               <a:rPr lang="en-US" smtClean="0"/>
-              <a:t>10/1/2021</a:t>
+              <a:t>1/12/2025</a:t>
             </a:fld>
             <a:endParaRPr lang="en-US"/>
           </a:p>
@@ -3458,7 +3442,7 @@
           <a:p>
             <a:fld id="{7BF7D500-1223-4445-9EB2-2C72C770F9EB}" type="datetimeFigureOut">
               <a:rPr lang="en-US" smtClean="0"/>
-              <a:t>10/1/2021</a:t>
+              <a:t>1/12/2025</a:t>
             </a:fld>
             <a:endParaRPr lang="en-US"/>
           </a:p>
@@ -3641,7 +3625,7 @@
               <a:pPr>
                 <a:defRPr/>
               </a:pPr>
-              <a:t>10/1/2021</a:t>
+              <a:t>1/12/2025</a:t>
             </a:fld>
             <a:endParaRPr lang="en-US"/>
           </a:p>
@@ -3795,7 +3779,7 @@
           <a:p>
             <a:fld id="{7BF7D500-1223-4445-9EB2-2C72C770F9EB}" type="datetimeFigureOut">
               <a:rPr lang="en-US" smtClean="0"/>
-              <a:t>10/1/2021</a:t>
+              <a:t>1/12/2025</a:t>
             </a:fld>
             <a:endParaRPr lang="en-US"/>
           </a:p>
@@ -4040,7 +4024,7 @@
           <a:p>
             <a:fld id="{7BF7D500-1223-4445-9EB2-2C72C770F9EB}" type="datetimeFigureOut">
               <a:rPr lang="en-US" smtClean="0"/>
-              <a:t>10/1/2021</a:t>
+              <a:t>1/12/2025</a:t>
             </a:fld>
             <a:endParaRPr lang="en-US"/>
           </a:p>
@@ -4269,7 +4253,7 @@
           <a:p>
             <a:fld id="{7BF7D500-1223-4445-9EB2-2C72C770F9EB}" type="datetimeFigureOut">
               <a:rPr lang="en-US" smtClean="0"/>
-              <a:t>10/1/2021</a:t>
+              <a:t>1/12/2025</a:t>
             </a:fld>
             <a:endParaRPr lang="en-US"/>
           </a:p>
@@ -4633,7 +4617,7 @@
           <a:p>
             <a:fld id="{7BF7D500-1223-4445-9EB2-2C72C770F9EB}" type="datetimeFigureOut">
               <a:rPr lang="en-US" smtClean="0"/>
-              <a:t>10/1/2021</a:t>
+              <a:t>1/12/2025</a:t>
             </a:fld>
             <a:endParaRPr lang="en-US"/>
           </a:p>
@@ -4750,7 +4734,7 @@
           <a:p>
             <a:fld id="{7BF7D500-1223-4445-9EB2-2C72C770F9EB}" type="datetimeFigureOut">
               <a:rPr lang="en-US" smtClean="0"/>
-              <a:t>10/1/2021</a:t>
+              <a:t>1/12/2025</a:t>
             </a:fld>
             <a:endParaRPr lang="en-US"/>
           </a:p>
@@ -4845,7 +4829,7 @@
           <a:p>
             <a:fld id="{7BF7D500-1223-4445-9EB2-2C72C770F9EB}" type="datetimeFigureOut">
               <a:rPr lang="en-US" smtClean="0"/>
-              <a:t>10/1/2021</a:t>
+              <a:t>1/12/2025</a:t>
             </a:fld>
             <a:endParaRPr lang="en-US"/>
           </a:p>
@@ -5120,7 +5104,7 @@
           <a:p>
             <a:fld id="{7BF7D500-1223-4445-9EB2-2C72C770F9EB}" type="datetimeFigureOut">
               <a:rPr lang="en-US" smtClean="0"/>
-              <a:t>10/1/2021</a:t>
+              <a:t>1/12/2025</a:t>
             </a:fld>
             <a:endParaRPr lang="en-US"/>
           </a:p>
@@ -5372,7 +5356,7 @@
           <a:p>
             <a:fld id="{7BF7D500-1223-4445-9EB2-2C72C770F9EB}" type="datetimeFigureOut">
               <a:rPr lang="en-US" smtClean="0"/>
-              <a:t>10/1/2021</a:t>
+              <a:t>1/12/2025</a:t>
             </a:fld>
             <a:endParaRPr lang="en-US"/>
           </a:p>
@@ -5540,7 +5524,7 @@
           <a:p>
             <a:fld id="{7BF7D500-1223-4445-9EB2-2C72C770F9EB}" type="datetimeFigureOut">
               <a:rPr lang="en-US" smtClean="0"/>
-              <a:t>10/1/2021</a:t>
+              <a:t>1/12/2025</a:t>
             </a:fld>
             <a:endParaRPr lang="en-US"/>
           </a:p>
@@ -5718,7 +5702,7 @@
           <a:p>
             <a:fld id="{7BF7D500-1223-4445-9EB2-2C72C770F9EB}" type="datetimeFigureOut">
               <a:rPr lang="en-US" smtClean="0"/>
-              <a:t>10/1/2021</a:t>
+              <a:t>1/12/2025</a:t>
             </a:fld>
             <a:endParaRPr lang="en-US"/>
           </a:p>
@@ -5962,7 +5946,7 @@
               <a:pPr>
                 <a:defRPr/>
               </a:pPr>
-              <a:t>10/1/2021</a:t>
+              <a:t>1/12/2025</a:t>
             </a:fld>
             <a:endParaRPr lang="en-US"/>
           </a:p>
@@ -6312,7 +6296,7 @@
               <a:pPr>
                 <a:defRPr/>
               </a:pPr>
-              <a:t>10/1/2021</a:t>
+              <a:t>1/12/2025</a:t>
             </a:fld>
             <a:endParaRPr lang="en-US"/>
           </a:p>
@@ -6476,7 +6460,7 @@
               <a:pPr>
                 <a:defRPr/>
               </a:pPr>
-              <a:t>10/1/2021</a:t>
+              <a:t>1/12/2025</a:t>
             </a:fld>
             <a:endParaRPr lang="en-US"/>
           </a:p>
@@ -6567,7 +6551,7 @@
               <a:pPr>
                 <a:defRPr/>
               </a:pPr>
-              <a:t>10/1/2021</a:t>
+              <a:t>1/12/2025</a:t>
             </a:fld>
             <a:endParaRPr lang="en-US"/>
           </a:p>
@@ -6676,7 +6660,7 @@
               <a:pPr>
                 <a:defRPr/>
               </a:pPr>
-              <a:t>10/1/2021</a:t>
+              <a:t>1/12/2025</a:t>
             </a:fld>
             <a:endParaRPr lang="en-US"/>
           </a:p>
@@ -6861,7 +6845,7 @@
           <a:p>
             <a:fld id="{344494C4-6097-4BA9-B81C-8FE8D10E85BA}" type="datetimeFigureOut">
               <a:rPr lang="en-US" smtClean="0"/>
-              <a:t>10/1/2021</a:t>
+              <a:t>1/12/2025</a:t>
             </a:fld>
             <a:endParaRPr lang="en-US"/>
           </a:p>
@@ -7045,7 +7029,7 @@
           <a:p>
             <a:fld id="{344494C4-6097-4BA9-B81C-8FE8D10E85BA}" type="datetimeFigureOut">
               <a:rPr lang="en-US" smtClean="0"/>
-              <a:t>10/1/2021</a:t>
+              <a:t>1/12/2025</a:t>
             </a:fld>
             <a:endParaRPr lang="en-US"/>
           </a:p>
@@ -7294,7 +7278,7 @@
               <a:pPr>
                 <a:defRPr/>
               </a:pPr>
-              <a:t>10/1/2021</a:t>
+              <a:t>1/12/2025</a:t>
             </a:fld>
             <a:endParaRPr lang="en-US"/>
           </a:p>
@@ -8548,7 +8532,7 @@
           <a:p>
             <a:fld id="{7BF7D500-1223-4445-9EB2-2C72C770F9EB}" type="datetimeFigureOut">
               <a:rPr lang="en-US" smtClean="0"/>
-              <a:t>10/1/2021</a:t>
+              <a:t>1/12/2025</a:t>
             </a:fld>
             <a:endParaRPr lang="en-US"/>
           </a:p>
@@ -9177,6 +9161,70 @@
 </file>
 
 <file path=ppt/slides/slide10.xml><?xml version="1.0" encoding="utf-8"?>
+<p:sld xmlns:a="http://schemas.openxmlformats.org/drawingml/2006/main" xmlns:r="http://schemas.openxmlformats.org/officeDocument/2006/relationships" xmlns:p="http://schemas.openxmlformats.org/presentationml/2006/main">
+  <p:cSld>
+    <p:spTree>
+      <p:nvGrpSpPr>
+        <p:cNvPr id="1" name=""/>
+        <p:cNvGrpSpPr/>
+        <p:nvPr/>
+      </p:nvGrpSpPr>
+      <p:grpSpPr>
+        <a:xfrm>
+          <a:off x="0" y="0"/>
+          <a:ext cx="0" cy="0"/>
+          <a:chOff x="0" y="0"/>
+          <a:chExt cx="0" cy="0"/>
+        </a:xfrm>
+      </p:grpSpPr>
+      <p:sp>
+        <p:nvSpPr>
+          <p:cNvPr id="2" name="Title 1">
+            <a:extLst>
+              <a:ext uri="{FF2B5EF4-FFF2-40B4-BE49-F238E27FC236}">
+                <a16:creationId xmlns:a16="http://schemas.microsoft.com/office/drawing/2014/main" id="{764AD14C-6D94-4048-8030-AF3B00C6ADBA}"/>
+              </a:ext>
+            </a:extLst>
+          </p:cNvPr>
+          <p:cNvSpPr>
+            <a:spLocks noGrp="1"/>
+          </p:cNvSpPr>
+          <p:nvPr>
+            <p:ph type="title"/>
+          </p:nvPr>
+        </p:nvSpPr>
+        <p:spPr>
+          <a:xfrm>
+            <a:off x="1905000" y="2590800"/>
+            <a:ext cx="9220200" cy="990600"/>
+          </a:xfrm>
+        </p:spPr>
+        <p:txBody>
+          <a:bodyPr/>
+          <a:lstStyle/>
+          <a:p>
+            <a:pPr algn="ctr"/>
+            <a:r>
+              <a:rPr lang="en-US" dirty="0"/>
+              <a:t>Part B: Analyzing randomized algorithms</a:t>
+            </a:r>
+          </a:p>
+        </p:txBody>
+      </p:sp>
+    </p:spTree>
+    <p:extLst>
+      <p:ext uri="{BB962C8B-B14F-4D97-AF65-F5344CB8AC3E}">
+        <p14:creationId xmlns:p14="http://schemas.microsoft.com/office/powerpoint/2010/main" val="1929170631"/>
+      </p:ext>
+    </p:extLst>
+  </p:cSld>
+  <p:clrMapOvr>
+    <a:masterClrMapping/>
+  </p:clrMapOvr>
+</p:sld>
+</file>
+
+<file path=ppt/slides/slide11.xml><?xml version="1.0" encoding="utf-8"?>
 <p:sld xmlns:a="http://schemas.openxmlformats.org/drawingml/2006/main" xmlns:r="http://schemas.openxmlformats.org/officeDocument/2006/relationships" xmlns:p="http://schemas.openxmlformats.org/presentationml/2006/main">
   <p:cSld>
     <p:spTree>
@@ -10702,7 +10750,158 @@
 </p:sld>
 </file>
 
-<file path=ppt/slides/slide11.xml><?xml version="1.0" encoding="utf-8"?>
+<file path=ppt/slides/slide12.xml><?xml version="1.0" encoding="utf-8"?>
+<p:sld xmlns:a="http://schemas.openxmlformats.org/drawingml/2006/main" xmlns:r="http://schemas.openxmlformats.org/officeDocument/2006/relationships" xmlns:p="http://schemas.openxmlformats.org/presentationml/2006/main">
+  <p:cSld>
+    <p:spTree>
+      <p:nvGrpSpPr>
+        <p:cNvPr id="1" name="">
+          <a:extLst>
+            <a:ext uri="{FF2B5EF4-FFF2-40B4-BE49-F238E27FC236}">
+              <a16:creationId xmlns:a16="http://schemas.microsoft.com/office/drawing/2014/main" id="{E38C827F-064F-9351-9E93-63447B37BBD4}"/>
+            </a:ext>
+          </a:extLst>
+        </p:cNvPr>
+        <p:cNvGrpSpPr/>
+        <p:nvPr/>
+      </p:nvGrpSpPr>
+      <p:grpSpPr>
+        <a:xfrm>
+          <a:off x="0" y="0"/>
+          <a:ext cx="0" cy="0"/>
+          <a:chOff x="0" y="0"/>
+          <a:chExt cx="0" cy="0"/>
+        </a:xfrm>
+      </p:grpSpPr>
+      <p:sp>
+        <p:nvSpPr>
+          <p:cNvPr id="2" name="Title 1">
+            <a:extLst>
+              <a:ext uri="{FF2B5EF4-FFF2-40B4-BE49-F238E27FC236}">
+                <a16:creationId xmlns:a16="http://schemas.microsoft.com/office/drawing/2014/main" id="{5C3C0E6D-9B84-30CB-5CB8-654FF2485EB4}"/>
+              </a:ext>
+            </a:extLst>
+          </p:cNvPr>
+          <p:cNvSpPr>
+            <a:spLocks noGrp="1"/>
+          </p:cNvSpPr>
+          <p:nvPr>
+            <p:ph type="title"/>
+          </p:nvPr>
+        </p:nvSpPr>
+        <p:spPr/>
+        <p:txBody>
+          <a:bodyPr/>
+          <a:lstStyle/>
+          <a:p>
+            <a:r>
+              <a:rPr lang="en-US" sz="3000" dirty="0"/>
+              <a:t>Strategy for finding </a:t>
+            </a:r>
+            <a:r>
+              <a:rPr lang="en-US" sz="3000" dirty="0">
+                <a:solidFill>
+                  <a:srgbClr val="700000"/>
+                </a:solidFill>
+              </a:rPr>
+              <a:t>Expected Case for Randomized </a:t>
+            </a:r>
+            <a:r>
+              <a:rPr lang="en-US" sz="3000" dirty="0" err="1">
+                <a:solidFill>
+                  <a:srgbClr val="700000"/>
+                </a:solidFill>
+              </a:rPr>
+              <a:t>Alg</a:t>
+            </a:r>
+            <a:endParaRPr lang="en-US" dirty="0"/>
+          </a:p>
+        </p:txBody>
+      </p:sp>
+      <p:sp>
+        <p:nvSpPr>
+          <p:cNvPr id="3" name="Content Placeholder 2">
+            <a:extLst>
+              <a:ext uri="{FF2B5EF4-FFF2-40B4-BE49-F238E27FC236}">
+                <a16:creationId xmlns:a16="http://schemas.microsoft.com/office/drawing/2014/main" id="{7EBCA3F1-837B-AD44-DA07-00B6A7D78D4A}"/>
+              </a:ext>
+            </a:extLst>
+          </p:cNvPr>
+          <p:cNvSpPr>
+            <a:spLocks noGrp="1"/>
+          </p:cNvSpPr>
+          <p:nvPr>
+            <p:ph sz="quarter" idx="1"/>
+          </p:nvPr>
+        </p:nvSpPr>
+        <p:spPr/>
+        <p:txBody>
+          <a:bodyPr/>
+          <a:lstStyle/>
+          <a:p>
+            <a:r>
+              <a:rPr lang="en-US" strike="sngStrike" dirty="0"/>
+              <a:t>Step 0: Make assumption about distribution of inputs</a:t>
+            </a:r>
+          </a:p>
+          <a:p>
+            <a:r>
+              <a:rPr lang="en-US" dirty="0"/>
+              <a:t>Step 0: Inspect the randomness in the algorithm </a:t>
+            </a:r>
+          </a:p>
+          <a:p>
+            <a:endParaRPr lang="en-US" sz="800" dirty="0"/>
+          </a:p>
+          <a:p>
+            <a:r>
+              <a:rPr lang="en-US" dirty="0"/>
+              <a:t>Step 1: Determine the possible cases</a:t>
+            </a:r>
+          </a:p>
+          <a:p>
+            <a:endParaRPr lang="en-US" sz="800" dirty="0"/>
+          </a:p>
+          <a:p>
+            <a:r>
+              <a:rPr lang="en-US" dirty="0"/>
+              <a:t>Step 2: Determine the probability of each case</a:t>
+            </a:r>
+          </a:p>
+          <a:p>
+            <a:endParaRPr lang="en-US" sz="800" dirty="0"/>
+          </a:p>
+          <a:p>
+            <a:r>
+              <a:rPr lang="en-US" dirty="0"/>
+              <a:t>Step 3: Determine the time taken for each case</a:t>
+            </a:r>
+          </a:p>
+          <a:p>
+            <a:endParaRPr lang="en-US" sz="800" dirty="0"/>
+          </a:p>
+          <a:p>
+            <a:r>
+              <a:rPr lang="en-US" dirty="0"/>
+              <a:t>Step 4: Compute the expected time (average) , which is the sum of time for each case weighted by its probability </a:t>
+            </a:r>
+          </a:p>
+        </p:txBody>
+      </p:sp>
+    </p:spTree>
+    <p:extLst>
+      <p:ext uri="{BB962C8B-B14F-4D97-AF65-F5344CB8AC3E}">
+        <p14:creationId xmlns:p14="http://schemas.microsoft.com/office/powerpoint/2010/main" val="4200754545"/>
+      </p:ext>
+    </p:extLst>
+  </p:cSld>
+  <p:clrMapOvr>
+    <a:masterClrMapping/>
+  </p:clrMapOvr>
+</p:sld>
+</file>
+
+<file path=ppt/slides/slide13.xml><?xml version="1.0" encoding="utf-8"?>
 <p:sld xmlns:a="http://schemas.openxmlformats.org/drawingml/2006/main" xmlns:r="http://schemas.openxmlformats.org/officeDocument/2006/relationships" xmlns:p="http://schemas.openxmlformats.org/presentationml/2006/main">
   <p:cSld>
     <p:spTree>
@@ -11616,7 +11815,487 @@
 </p:sld>
 </file>
 
-<file path=ppt/slides/slide12.xml><?xml version="1.0" encoding="utf-8"?>
+<file path=ppt/slides/slide14.xml><?xml version="1.0" encoding="utf-8"?>
+<p:sld xmlns:a="http://schemas.openxmlformats.org/drawingml/2006/main" xmlns:r="http://schemas.openxmlformats.org/officeDocument/2006/relationships" xmlns:p="http://schemas.openxmlformats.org/presentationml/2006/main">
+  <p:cSld>
+    <p:spTree>
+      <p:nvGrpSpPr>
+        <p:cNvPr id="1" name=""/>
+        <p:cNvGrpSpPr/>
+        <p:nvPr/>
+      </p:nvGrpSpPr>
+      <p:grpSpPr>
+        <a:xfrm>
+          <a:off x="0" y="0"/>
+          <a:ext cx="0" cy="0"/>
+          <a:chOff x="0" y="0"/>
+          <a:chExt cx="0" cy="0"/>
+        </a:xfrm>
+      </p:grpSpPr>
+      <p:sp>
+        <p:nvSpPr>
+          <p:cNvPr id="2" name="Title 1">
+            <a:extLst>
+              <a:ext uri="{FF2B5EF4-FFF2-40B4-BE49-F238E27FC236}">
+                <a16:creationId xmlns:a16="http://schemas.microsoft.com/office/drawing/2014/main" id="{540EF886-0DCF-A494-A851-D267FFBE59BC}"/>
+              </a:ext>
+            </a:extLst>
+          </p:cNvPr>
+          <p:cNvSpPr>
+            <a:spLocks noGrp="1"/>
+          </p:cNvSpPr>
+          <p:nvPr>
+            <p:ph type="title"/>
+          </p:nvPr>
+        </p:nvSpPr>
+        <p:spPr/>
+        <p:txBody>
+          <a:bodyPr/>
+          <a:lstStyle/>
+          <a:p>
+            <a:r>
+              <a:rPr lang="en-US" dirty="0"/>
+              <a:t>Typical type of randomness</a:t>
+            </a:r>
+          </a:p>
+        </p:txBody>
+      </p:sp>
+      <mc:AlternateContent xmlns:mc="http://schemas.openxmlformats.org/markup-compatibility/2006">
+        <mc:Choice xmlns:a14="http://schemas.microsoft.com/office/drawing/2010/main" Requires="a14">
+          <p:sp>
+            <p:nvSpPr>
+              <p:cNvPr id="3" name="Content Placeholder 2">
+                <a:extLst>
+                  <a:ext uri="{FF2B5EF4-FFF2-40B4-BE49-F238E27FC236}">
+                    <a16:creationId xmlns:a16="http://schemas.microsoft.com/office/drawing/2014/main" id="{482F0DF7-6A66-D99B-16EF-C827389D591F}"/>
+                  </a:ext>
+                </a:extLst>
+              </p:cNvPr>
+              <p:cNvSpPr>
+                <a:spLocks noGrp="1"/>
+              </p:cNvSpPr>
+              <p:nvPr>
+                <p:ph sz="quarter" idx="1"/>
+              </p:nvPr>
+            </p:nvSpPr>
+            <p:spPr/>
+            <p:txBody>
+              <a:bodyPr/>
+              <a:lstStyle/>
+              <a:p>
+                <a:r>
+                  <a:rPr lang="en-US" dirty="0"/>
+                  <a:t>Random shuffle / permutation of </a:t>
+                </a:r>
+                <a14:m>
+                  <m:oMath xmlns:m="http://schemas.openxmlformats.org/officeDocument/2006/math">
+                    <m:r>
+                      <a:rPr lang="en-US" i="1" dirty="0" smtClean="0">
+                        <a:latin typeface="Cambria Math" panose="02040503050406030204" pitchFamily="18" charset="0"/>
+                      </a:rPr>
+                      <m:t>𝑛</m:t>
+                    </m:r>
+                  </m:oMath>
+                </a14:m>
+                <a:r>
+                  <a:rPr lang="en-US" dirty="0"/>
+                  <a:t> elements </a:t>
+                </a:r>
+              </a:p>
+              <a:p>
+                <a:pPr lvl="1"/>
+                <a:r>
+                  <a:rPr lang="en-US" dirty="0" err="1"/>
+                  <a:t>random.shuffle</a:t>
+                </a:r>
+                <a:r>
+                  <a:rPr lang="en-US" dirty="0"/>
+                  <a:t>(A)  :  </a:t>
+                </a:r>
+              </a:p>
+              <a:p>
+                <a:pPr lvl="1"/>
+                <a14:m>
+                  <m:oMath xmlns:m="http://schemas.openxmlformats.org/officeDocument/2006/math">
+                    <m:r>
+                      <a:rPr lang="en-US" i="1" dirty="0" smtClean="0">
+                        <a:latin typeface="Cambria Math" panose="02040503050406030204" pitchFamily="18" charset="0"/>
+                      </a:rPr>
+                      <m:t>𝑥</m:t>
+                    </m:r>
+                  </m:oMath>
+                </a14:m>
+                <a:r>
+                  <a:rPr lang="en-US" dirty="0"/>
+                  <a:t> = </a:t>
+                </a:r>
+                <a:r>
+                  <a:rPr lang="en-US" dirty="0" err="1"/>
+                  <a:t>np.random.randint</a:t>
+                </a:r>
+                <a:r>
+                  <a:rPr lang="en-US" dirty="0"/>
+                  <a:t>(0, n); or </a:t>
+                </a:r>
+                <a14:m>
+                  <m:oMath xmlns:m="http://schemas.openxmlformats.org/officeDocument/2006/math">
+                    <m:r>
+                      <a:rPr lang="en-US" i="1" dirty="0" smtClean="0">
+                        <a:latin typeface="Cambria Math" panose="02040503050406030204" pitchFamily="18" charset="0"/>
+                      </a:rPr>
+                      <m:t>𝑥</m:t>
+                    </m:r>
+                  </m:oMath>
+                </a14:m>
+                <a:r>
+                  <a:rPr lang="en-US" dirty="0"/>
+                  <a:t> = random(n) </a:t>
+                </a:r>
+              </a:p>
+              <a:p>
+                <a:pPr lvl="2"/>
+                <a14:m>
+                  <m:oMath xmlns:m="http://schemas.openxmlformats.org/officeDocument/2006/math">
+                    <m:r>
+                      <m:rPr>
+                        <m:sty m:val="p"/>
+                      </m:rPr>
+                      <a:rPr lang="en-US" i="1" dirty="0" smtClean="0">
+                        <a:latin typeface="Cambria Math" panose="02040503050406030204" pitchFamily="18" charset="0"/>
+                      </a:rPr>
+                      <m:t>Pr</m:t>
+                    </m:r>
+                    <m:r>
+                      <a:rPr lang="en-US" i="1" dirty="0" smtClean="0">
+                        <a:latin typeface="Cambria Math" panose="02040503050406030204" pitchFamily="18" charset="0"/>
+                      </a:rPr>
+                      <m:t>⁡[</m:t>
+                    </m:r>
+                    <m:r>
+                      <a:rPr lang="en-US" i="1" dirty="0" smtClean="0">
+                        <a:latin typeface="Cambria Math" panose="02040503050406030204" pitchFamily="18" charset="0"/>
+                      </a:rPr>
+                      <m:t>𝑥</m:t>
+                    </m:r>
+                    <m:r>
+                      <a:rPr lang="en-US" i="1" dirty="0">
+                        <a:latin typeface="Cambria Math" panose="02040503050406030204" pitchFamily="18" charset="0"/>
+                      </a:rPr>
+                      <m:t> </m:t>
+                    </m:r>
+                    <m:r>
+                      <a:rPr lang="en-US" i="1" dirty="0" smtClean="0">
+                        <a:latin typeface="Cambria Math" panose="02040503050406030204" pitchFamily="18" charset="0"/>
+                      </a:rPr>
+                      <m:t>=</m:t>
+                    </m:r>
+                    <m:r>
+                      <a:rPr lang="en-US" i="1" dirty="0">
+                        <a:latin typeface="Cambria Math" panose="02040503050406030204" pitchFamily="18" charset="0"/>
+                      </a:rPr>
+                      <m:t> </m:t>
+                    </m:r>
+                    <m:r>
+                      <a:rPr lang="en-US" i="1" dirty="0" err="1" smtClean="0">
+                        <a:latin typeface="Cambria Math" panose="02040503050406030204" pitchFamily="18" charset="0"/>
+                      </a:rPr>
+                      <m:t>𝑖</m:t>
+                    </m:r>
+                    <m:r>
+                      <a:rPr lang="en-US" i="1" dirty="0" smtClean="0">
+                        <a:latin typeface="Cambria Math" panose="02040503050406030204" pitchFamily="18" charset="0"/>
+                      </a:rPr>
+                      <m:t>]</m:t>
+                    </m:r>
+                    <m:r>
+                      <a:rPr lang="en-US" i="1" dirty="0">
+                        <a:latin typeface="Cambria Math" panose="02040503050406030204" pitchFamily="18" charset="0"/>
+                      </a:rPr>
+                      <m:t> </m:t>
+                    </m:r>
+                    <m:r>
+                      <a:rPr lang="en-US" i="1" dirty="0" smtClean="0">
+                        <a:latin typeface="Cambria Math" panose="02040503050406030204" pitchFamily="18" charset="0"/>
+                      </a:rPr>
+                      <m:t>=</m:t>
+                    </m:r>
+                    <m:r>
+                      <a:rPr lang="en-US" i="1" dirty="0">
+                        <a:latin typeface="Cambria Math" panose="02040503050406030204" pitchFamily="18" charset="0"/>
+                      </a:rPr>
+                      <m:t> </m:t>
+                    </m:r>
+                    <m:f>
+                      <m:fPr>
+                        <m:ctrlPr>
+                          <a:rPr lang="en-US" i="1" dirty="0" smtClean="0">
+                            <a:latin typeface="Cambria Math" panose="02040503050406030204" pitchFamily="18" charset="0"/>
+                          </a:rPr>
+                        </m:ctrlPr>
+                      </m:fPr>
+                      <m:num>
+                        <m:r>
+                          <a:rPr lang="en-US" b="0" i="1" dirty="0" smtClean="0">
+                            <a:latin typeface="Cambria Math" panose="02040503050406030204" pitchFamily="18" charset="0"/>
+                          </a:rPr>
+                          <m:t>1</m:t>
+                        </m:r>
+                      </m:num>
+                      <m:den>
+                        <m:r>
+                          <a:rPr lang="en-US" b="0" i="1" dirty="0" smtClean="0">
+                            <a:latin typeface="Cambria Math" panose="02040503050406030204" pitchFamily="18" charset="0"/>
+                          </a:rPr>
+                          <m:t>𝑛</m:t>
+                        </m:r>
+                      </m:den>
+                    </m:f>
+                  </m:oMath>
+                </a14:m>
+                <a:r>
+                  <a:rPr lang="en-US" dirty="0"/>
+                  <a:t> for any  </a:t>
+                </a:r>
+                <a14:m>
+                  <m:oMath xmlns:m="http://schemas.openxmlformats.org/officeDocument/2006/math">
+                    <m:r>
+                      <a:rPr lang="en-US" b="0" i="1" smtClean="0">
+                        <a:latin typeface="Cambria Math" panose="02040503050406030204" pitchFamily="18" charset="0"/>
+                      </a:rPr>
+                      <m:t>𝑥</m:t>
+                    </m:r>
+                    <m:r>
+                      <a:rPr lang="en-US" b="0" i="1" smtClean="0">
+                        <a:latin typeface="Cambria Math" panose="02040503050406030204" pitchFamily="18" charset="0"/>
+                      </a:rPr>
+                      <m:t>∈</m:t>
+                    </m:r>
+                    <m:d>
+                      <m:dPr>
+                        <m:begChr m:val="["/>
+                        <m:endChr m:val="]"/>
+                        <m:ctrlPr>
+                          <a:rPr lang="en-US" b="0" i="1" smtClean="0">
+                            <a:latin typeface="Cambria Math" panose="02040503050406030204" pitchFamily="18" charset="0"/>
+                          </a:rPr>
+                        </m:ctrlPr>
+                      </m:dPr>
+                      <m:e>
+                        <m:r>
+                          <a:rPr lang="en-US" b="0" i="1" smtClean="0">
+                            <a:latin typeface="Cambria Math" panose="02040503050406030204" pitchFamily="18" charset="0"/>
+                          </a:rPr>
+                          <m:t>0, </m:t>
+                        </m:r>
+                        <m:r>
+                          <a:rPr lang="en-US" b="0" i="1" smtClean="0">
+                            <a:latin typeface="Cambria Math" panose="02040503050406030204" pitchFamily="18" charset="0"/>
+                          </a:rPr>
+                          <m:t>𝑛</m:t>
+                        </m:r>
+                        <m:r>
+                          <a:rPr lang="en-US" b="0" i="1" smtClean="0">
+                            <a:latin typeface="Cambria Math" panose="02040503050406030204" pitchFamily="18" charset="0"/>
+                          </a:rPr>
+                          <m:t>−1</m:t>
+                        </m:r>
+                      </m:e>
+                    </m:d>
+                  </m:oMath>
+                </a14:m>
+                <a:endParaRPr lang="en-US" dirty="0"/>
+              </a:p>
+              <a:p>
+                <a:pPr lvl="1"/>
+                <a:endParaRPr lang="en-US" dirty="0"/>
+              </a:p>
+              <a:p>
+                <a:r>
+                  <a:rPr lang="en-US" dirty="0"/>
+                  <a:t>Random coin flip</a:t>
+                </a:r>
+              </a:p>
+              <a:p>
+                <a:pPr lvl="1"/>
+                <a:r>
+                  <a:rPr lang="en-US" dirty="0"/>
+                  <a:t>Flip a coin and the probability of head is </a:t>
+                </a:r>
+                <a14:m>
+                  <m:oMath xmlns:m="http://schemas.openxmlformats.org/officeDocument/2006/math">
+                    <m:r>
+                      <a:rPr lang="en-US" i="1" dirty="0" smtClean="0">
+                        <a:latin typeface="Cambria Math" panose="02040503050406030204" pitchFamily="18" charset="0"/>
+                      </a:rPr>
+                      <m:t>𝑝</m:t>
+                    </m:r>
+                  </m:oMath>
+                </a14:m>
+                <a:r>
+                  <a:rPr lang="en-US" dirty="0"/>
+                  <a:t>. This means that </a:t>
+                </a:r>
+                <a14:m>
+                  <m:oMath xmlns:m="http://schemas.openxmlformats.org/officeDocument/2006/math">
+                    <m:r>
+                      <m:rPr>
+                        <m:sty m:val="p"/>
+                      </m:rPr>
+                      <a:rPr lang="en-US" i="1" dirty="0" smtClean="0">
+                        <a:latin typeface="Cambria Math" panose="02040503050406030204" pitchFamily="18" charset="0"/>
+                      </a:rPr>
+                      <m:t>Pr</m:t>
+                    </m:r>
+                    <m:r>
+                      <a:rPr lang="en-US" i="1" dirty="0" smtClean="0">
+                        <a:latin typeface="Cambria Math" panose="02040503050406030204" pitchFamily="18" charset="0"/>
+                      </a:rPr>
+                      <m:t>⁡[</m:t>
+                    </m:r>
+                    <m:r>
+                      <a:rPr lang="en-US" i="1" dirty="0" smtClean="0">
+                        <a:latin typeface="Cambria Math" panose="02040503050406030204" pitchFamily="18" charset="0"/>
+                      </a:rPr>
+                      <m:t>𝑡𝑎𝑖𝑙</m:t>
+                    </m:r>
+                    <m:r>
+                      <a:rPr lang="en-US" i="1" dirty="0" smtClean="0">
+                        <a:latin typeface="Cambria Math" panose="02040503050406030204" pitchFamily="18" charset="0"/>
+                      </a:rPr>
+                      <m:t>] </m:t>
+                    </m:r>
+                  </m:oMath>
+                </a14:m>
+                <a:r>
+                  <a:rPr lang="en-US" dirty="0"/>
+                  <a:t>= </a:t>
+                </a:r>
+                <a14:m>
+                  <m:oMath xmlns:m="http://schemas.openxmlformats.org/officeDocument/2006/math">
+                    <m:r>
+                      <a:rPr lang="en-US" i="1" dirty="0" smtClean="0">
+                        <a:latin typeface="Cambria Math" panose="02040503050406030204" pitchFamily="18" charset="0"/>
+                      </a:rPr>
+                      <m:t>1−</m:t>
+                    </m:r>
+                    <m:r>
+                      <a:rPr lang="en-US" i="1" dirty="0" smtClean="0">
+                        <a:latin typeface="Cambria Math" panose="02040503050406030204" pitchFamily="18" charset="0"/>
+                      </a:rPr>
+                      <m:t>𝑝</m:t>
+                    </m:r>
+                  </m:oMath>
+                </a14:m>
+                <a:r>
+                  <a:rPr lang="en-US" dirty="0"/>
+                  <a:t> </a:t>
+                </a:r>
+              </a:p>
+              <a:p>
+                <a:pPr lvl="1"/>
+                <a:r>
+                  <a:rPr lang="en-US" dirty="0"/>
+                  <a:t>For a “fair coin”, </a:t>
+                </a:r>
+                <a14:m>
+                  <m:oMath xmlns:m="http://schemas.openxmlformats.org/officeDocument/2006/math">
+                    <m:r>
+                      <a:rPr lang="en-US" i="1" dirty="0" smtClean="0">
+                        <a:latin typeface="Cambria Math" panose="02040503050406030204" pitchFamily="18" charset="0"/>
+                      </a:rPr>
+                      <m:t>𝑝</m:t>
+                    </m:r>
+                    <m:r>
+                      <a:rPr lang="en-US" i="1" dirty="0">
+                        <a:latin typeface="Cambria Math" panose="02040503050406030204" pitchFamily="18" charset="0"/>
+                      </a:rPr>
+                      <m:t> </m:t>
+                    </m:r>
+                    <m:r>
+                      <a:rPr lang="en-US" i="1" dirty="0" smtClean="0">
+                        <a:latin typeface="Cambria Math" panose="02040503050406030204" pitchFamily="18" charset="0"/>
+                      </a:rPr>
+                      <m:t>=</m:t>
+                    </m:r>
+                    <m:r>
+                      <a:rPr lang="en-US" i="1" dirty="0">
+                        <a:latin typeface="Cambria Math" panose="02040503050406030204" pitchFamily="18" charset="0"/>
+                      </a:rPr>
+                      <m:t> </m:t>
+                    </m:r>
+                    <m:r>
+                      <a:rPr lang="en-US" i="1" dirty="0" smtClean="0">
+                        <a:latin typeface="Cambria Math" panose="02040503050406030204" pitchFamily="18" charset="0"/>
+                      </a:rPr>
+                      <m:t>0.</m:t>
+                    </m:r>
+                    <m:r>
+                      <a:rPr lang="en-US" i="1" dirty="0">
+                        <a:latin typeface="Cambria Math" panose="02040503050406030204" pitchFamily="18" charset="0"/>
+                      </a:rPr>
+                      <m:t>5</m:t>
+                    </m:r>
+                  </m:oMath>
+                </a14:m>
+                <a:endParaRPr lang="en-US" dirty="0"/>
+              </a:p>
+            </p:txBody>
+          </p:sp>
+        </mc:Choice>
+        <mc:Fallback>
+          <p:sp>
+            <p:nvSpPr>
+              <p:cNvPr id="3" name="Content Placeholder 2">
+                <a:extLst>
+                  <a:ext uri="{FF2B5EF4-FFF2-40B4-BE49-F238E27FC236}">
+                    <a16:creationId xmlns:a16="http://schemas.microsoft.com/office/drawing/2014/main" id="{482F0DF7-6A66-D99B-16EF-C827389D591F}"/>
+                  </a:ext>
+                </a:extLst>
+              </p:cNvPr>
+              <p:cNvSpPr>
+                <a:spLocks noGrp="1" noRot="1" noChangeAspect="1" noMove="1" noResize="1" noEditPoints="1" noAdjustHandles="1" noChangeArrowheads="1" noChangeShapeType="1" noTextEdit="1"/>
+              </p:cNvSpPr>
+              <p:nvPr>
+                <p:ph sz="quarter" idx="1"/>
+              </p:nvPr>
+            </p:nvSpPr>
+            <p:spPr>
+              <a:blipFill>
+                <a:blip r:embed="rId2"/>
+                <a:stretch>
+                  <a:fillRect l="-500" t="-1111"/>
+                </a:stretch>
+              </a:blipFill>
+            </p:spPr>
+            <p:txBody>
+              <a:bodyPr/>
+              <a:lstStyle/>
+              <a:p>
+                <a:r>
+                  <a:rPr lang="en-US">
+                    <a:noFill/>
+                  </a:rPr>
+                  <a:t> </a:t>
+                </a:r>
+              </a:p>
+            </p:txBody>
+          </p:sp>
+        </mc:Fallback>
+      </mc:AlternateContent>
+    </p:spTree>
+    <p:extLst>
+      <p:ext uri="{BB962C8B-B14F-4D97-AF65-F5344CB8AC3E}">
+        <p14:creationId xmlns:p14="http://schemas.microsoft.com/office/powerpoint/2010/main" val="3602641960"/>
+      </p:ext>
+    </p:extLst>
+  </p:cSld>
+  <p:clrMapOvr>
+    <a:masterClrMapping/>
+  </p:clrMapOvr>
+</p:sld>
+</file>
+
+<file path=ppt/slides/slide15.xml><?xml version="1.0" encoding="utf-8"?>
 <p:sld xmlns:a="http://schemas.openxmlformats.org/drawingml/2006/main" xmlns:r="http://schemas.openxmlformats.org/officeDocument/2006/relationships" xmlns:p="http://schemas.openxmlformats.org/presentationml/2006/main">
   <p:cSld>
     <p:spTree>
@@ -12371,7 +13050,7 @@
 </p:sld>
 </file>
 
-<file path=ppt/slides/slide13.xml><?xml version="1.0" encoding="utf-8"?>
+<file path=ppt/slides/slide16.xml><?xml version="1.0" encoding="utf-8"?>
 <p:sld xmlns:a="http://schemas.openxmlformats.org/drawingml/2006/main" xmlns:r="http://schemas.openxmlformats.org/officeDocument/2006/relationships" xmlns:p="http://schemas.openxmlformats.org/presentationml/2006/main">
   <p:cSld>
     <p:spTree>
@@ -13138,7 +13817,7 @@
 </p:sld>
 </file>
 
-<file path=ppt/slides/slide14.xml><?xml version="1.0" encoding="utf-8"?>
+<file path=ppt/slides/slide17.xml><?xml version="1.0" encoding="utf-8"?>
 <p:sld xmlns:a="http://schemas.openxmlformats.org/drawingml/2006/main" xmlns:r="http://schemas.openxmlformats.org/officeDocument/2006/relationships" xmlns:p="http://schemas.openxmlformats.org/presentationml/2006/main">
   <p:cSld>
     <p:spTree>
@@ -13555,7 +14234,7 @@
 </p:sld>
 </file>
 
-<file path=ppt/slides/slide15.xml><?xml version="1.0" encoding="utf-8"?>
+<file path=ppt/slides/slide18.xml><?xml version="1.0" encoding="utf-8"?>
 <p:sld xmlns:a="http://schemas.openxmlformats.org/drawingml/2006/main" xmlns:r="http://schemas.openxmlformats.org/officeDocument/2006/relationships" xmlns:p="http://schemas.openxmlformats.org/presentationml/2006/main">
   <p:cSld>
     <p:spTree>
@@ -14547,7 +15226,7 @@
 </p:sld>
 </file>
 
-<file path=ppt/slides/slide16.xml><?xml version="1.0" encoding="utf-8"?>
+<file path=ppt/slides/slide19.xml><?xml version="1.0" encoding="utf-8"?>
 <p:sld xmlns:a="http://schemas.openxmlformats.org/drawingml/2006/main" xmlns:r="http://schemas.openxmlformats.org/officeDocument/2006/relationships" xmlns:p="http://schemas.openxmlformats.org/presentationml/2006/main">
   <p:cSld>
     <p:spTree>
@@ -14670,7 +15349,71 @@
 </p:sld>
 </file>
 
-<file path=ppt/slides/slide17.xml><?xml version="1.0" encoding="utf-8"?>
+<file path=ppt/slides/slide2.xml><?xml version="1.0" encoding="utf-8"?>
+<p:sld xmlns:a="http://schemas.openxmlformats.org/drawingml/2006/main" xmlns:r="http://schemas.openxmlformats.org/officeDocument/2006/relationships" xmlns:p="http://schemas.openxmlformats.org/presentationml/2006/main">
+  <p:cSld>
+    <p:spTree>
+      <p:nvGrpSpPr>
+        <p:cNvPr id="1" name=""/>
+        <p:cNvGrpSpPr/>
+        <p:nvPr/>
+      </p:nvGrpSpPr>
+      <p:grpSpPr>
+        <a:xfrm>
+          <a:off x="0" y="0"/>
+          <a:ext cx="0" cy="0"/>
+          <a:chOff x="0" y="0"/>
+          <a:chExt cx="0" cy="0"/>
+        </a:xfrm>
+      </p:grpSpPr>
+      <p:sp>
+        <p:nvSpPr>
+          <p:cNvPr id="2" name="Title 1">
+            <a:extLst>
+              <a:ext uri="{FF2B5EF4-FFF2-40B4-BE49-F238E27FC236}">
+                <a16:creationId xmlns:a16="http://schemas.microsoft.com/office/drawing/2014/main" id="{764AD14C-6D94-4048-8030-AF3B00C6ADBA}"/>
+              </a:ext>
+            </a:extLst>
+          </p:cNvPr>
+          <p:cNvSpPr>
+            <a:spLocks noGrp="1"/>
+          </p:cNvSpPr>
+          <p:nvPr>
+            <p:ph type="title"/>
+          </p:nvPr>
+        </p:nvSpPr>
+        <p:spPr>
+          <a:xfrm>
+            <a:off x="1905000" y="2590800"/>
+            <a:ext cx="8229600" cy="990600"/>
+          </a:xfrm>
+        </p:spPr>
+        <p:txBody>
+          <a:bodyPr/>
+          <a:lstStyle/>
+          <a:p>
+            <a:pPr algn="ctr"/>
+            <a:r>
+              <a:rPr lang="en-US" dirty="0"/>
+              <a:t>Part A: Probabilistic analysis vs randomized algorithms</a:t>
+            </a:r>
+          </a:p>
+        </p:txBody>
+      </p:sp>
+    </p:spTree>
+    <p:extLst>
+      <p:ext uri="{BB962C8B-B14F-4D97-AF65-F5344CB8AC3E}">
+        <p14:creationId xmlns:p14="http://schemas.microsoft.com/office/powerpoint/2010/main" val="2423769801"/>
+      </p:ext>
+    </p:extLst>
+  </p:cSld>
+  <p:clrMapOvr>
+    <a:masterClrMapping/>
+  </p:clrMapOvr>
+</p:sld>
+</file>
+
+<file path=ppt/slides/slide20.xml><?xml version="1.0" encoding="utf-8"?>
 <p:sld xmlns:a="http://schemas.openxmlformats.org/drawingml/2006/main" xmlns:r="http://schemas.openxmlformats.org/officeDocument/2006/relationships" xmlns:p="http://schemas.openxmlformats.org/presentationml/2006/main">
   <p:cSld>
     <p:spTree>
@@ -15941,7 +16684,7 @@
 </p:sld>
 </file>
 
-<file path=ppt/slides/slide18.xml><?xml version="1.0" encoding="utf-8"?>
+<file path=ppt/slides/slide21.xml><?xml version="1.0" encoding="utf-8"?>
 <p:sld xmlns:a="http://schemas.openxmlformats.org/drawingml/2006/main" xmlns:r="http://schemas.openxmlformats.org/officeDocument/2006/relationships" xmlns:p="http://schemas.openxmlformats.org/presentationml/2006/main">
   <p:cSld>
     <p:spTree>
@@ -16894,7 +17637,7 @@
 </p:sld>
 </file>
 
-<file path=ppt/slides/slide19.xml><?xml version="1.0" encoding="utf-8"?>
+<file path=ppt/slides/slide22.xml><?xml version="1.0" encoding="utf-8"?>
 <p:sld xmlns:a="http://schemas.openxmlformats.org/drawingml/2006/main" xmlns:r="http://schemas.openxmlformats.org/officeDocument/2006/relationships" xmlns:p="http://schemas.openxmlformats.org/presentationml/2006/main">
   <p:cSld>
     <p:spTree>
@@ -16958,71 +17701,7 @@
 </p:sld>
 </file>
 
-<file path=ppt/slides/slide2.xml><?xml version="1.0" encoding="utf-8"?>
-<p:sld xmlns:a="http://schemas.openxmlformats.org/drawingml/2006/main" xmlns:r="http://schemas.openxmlformats.org/officeDocument/2006/relationships" xmlns:p="http://schemas.openxmlformats.org/presentationml/2006/main">
-  <p:cSld>
-    <p:spTree>
-      <p:nvGrpSpPr>
-        <p:cNvPr id="1" name=""/>
-        <p:cNvGrpSpPr/>
-        <p:nvPr/>
-      </p:nvGrpSpPr>
-      <p:grpSpPr>
-        <a:xfrm>
-          <a:off x="0" y="0"/>
-          <a:ext cx="0" cy="0"/>
-          <a:chOff x="0" y="0"/>
-          <a:chExt cx="0" cy="0"/>
-        </a:xfrm>
-      </p:grpSpPr>
-      <p:sp>
-        <p:nvSpPr>
-          <p:cNvPr id="2" name="Title 1">
-            <a:extLst>
-              <a:ext uri="{FF2B5EF4-FFF2-40B4-BE49-F238E27FC236}">
-                <a16:creationId xmlns:a16="http://schemas.microsoft.com/office/drawing/2014/main" id="{764AD14C-6D94-4048-8030-AF3B00C6ADBA}"/>
-              </a:ext>
-            </a:extLst>
-          </p:cNvPr>
-          <p:cNvSpPr>
-            <a:spLocks noGrp="1"/>
-          </p:cNvSpPr>
-          <p:nvPr>
-            <p:ph type="title"/>
-          </p:nvPr>
-        </p:nvSpPr>
-        <p:spPr>
-          <a:xfrm>
-            <a:off x="1905000" y="2590800"/>
-            <a:ext cx="8229600" cy="990600"/>
-          </a:xfrm>
-        </p:spPr>
-        <p:txBody>
-          <a:bodyPr/>
-          <a:lstStyle/>
-          <a:p>
-            <a:pPr algn="ctr"/>
-            <a:r>
-              <a:rPr lang="en-US" dirty="0"/>
-              <a:t>Part A: Probabilistic analysis vs randomized algorithms</a:t>
-            </a:r>
-          </a:p>
-        </p:txBody>
-      </p:sp>
-    </p:spTree>
-    <p:extLst>
-      <p:ext uri="{BB962C8B-B14F-4D97-AF65-F5344CB8AC3E}">
-        <p14:creationId xmlns:p14="http://schemas.microsoft.com/office/powerpoint/2010/main" val="2423769801"/>
-      </p:ext>
-    </p:extLst>
-  </p:cSld>
-  <p:clrMapOvr>
-    <a:masterClrMapping/>
-  </p:clrMapOvr>
-</p:sld>
-</file>
-
-<file path=ppt/slides/slide20.xml><?xml version="1.0" encoding="utf-8"?>
+<file path=ppt/slides/slide23.xml><?xml version="1.0" encoding="utf-8"?>
 <p:sld xmlns:a="http://schemas.openxmlformats.org/drawingml/2006/main" xmlns:r="http://schemas.openxmlformats.org/officeDocument/2006/relationships" xmlns:p="http://schemas.openxmlformats.org/presentationml/2006/main">
   <p:cSld>
     <p:spTree>
@@ -17173,7 +17852,7 @@
 </p:sld>
 </file>
 
-<file path=ppt/slides/slide21.xml><?xml version="1.0" encoding="utf-8"?>
+<file path=ppt/slides/slide24.xml><?xml version="1.0" encoding="utf-8"?>
 <p:sld xmlns:a="http://schemas.openxmlformats.org/drawingml/2006/main" xmlns:r="http://schemas.openxmlformats.org/officeDocument/2006/relationships" xmlns:p="http://schemas.openxmlformats.org/presentationml/2006/main">
   <p:cSld>
     <p:spTree>
@@ -17545,7 +18224,7 @@
 </p:sld>
 </file>
 
-<file path=ppt/slides/slide22.xml><?xml version="1.0" encoding="utf-8"?>
+<file path=ppt/slides/slide25.xml><?xml version="1.0" encoding="utf-8"?>
 <p:sld xmlns:a="http://schemas.openxmlformats.org/drawingml/2006/main" xmlns:r="http://schemas.openxmlformats.org/officeDocument/2006/relationships" xmlns:p="http://schemas.openxmlformats.org/presentationml/2006/main">
   <p:cSld>
     <p:spTree>
@@ -18238,7 +18917,7 @@
 </p:sld>
 </file>
 
-<file path=ppt/slides/slide23.xml><?xml version="1.0" encoding="utf-8"?>
+<file path=ppt/slides/slide26.xml><?xml version="1.0" encoding="utf-8"?>
 <p:sld xmlns:a="http://schemas.openxmlformats.org/drawingml/2006/main" xmlns:r="http://schemas.openxmlformats.org/officeDocument/2006/relationships" xmlns:p="http://schemas.openxmlformats.org/presentationml/2006/main">
   <p:cSld>
     <p:spTree>
@@ -19426,7 +20105,7 @@
 </p:sld>
 </file>
 
-<file path=ppt/slides/slide24.xml><?xml version="1.0" encoding="utf-8"?>
+<file path=ppt/slides/slide27.xml><?xml version="1.0" encoding="utf-8"?>
 <p:sld xmlns:a="http://schemas.openxmlformats.org/drawingml/2006/main" xmlns:r="http://schemas.openxmlformats.org/officeDocument/2006/relationships" xmlns:p="http://schemas.openxmlformats.org/presentationml/2006/main">
   <p:cSld>
     <p:spTree>
@@ -21790,6 +22469,140 @@
           <p:cNvPr id="2" name="Title 1">
             <a:extLst>
               <a:ext uri="{FF2B5EF4-FFF2-40B4-BE49-F238E27FC236}">
+                <a16:creationId xmlns:a16="http://schemas.microsoft.com/office/drawing/2014/main" id="{451F186C-862D-A175-CE8C-0C3B612FAAF5}"/>
+              </a:ext>
+            </a:extLst>
+          </p:cNvPr>
+          <p:cNvSpPr>
+            <a:spLocks noGrp="1"/>
+          </p:cNvSpPr>
+          <p:nvPr>
+            <p:ph type="title"/>
+          </p:nvPr>
+        </p:nvSpPr>
+        <p:spPr/>
+        <p:txBody>
+          <a:bodyPr/>
+          <a:lstStyle/>
+          <a:p>
+            <a:r>
+              <a:rPr lang="en-US" dirty="0"/>
+              <a:t>Strategy for finding </a:t>
+            </a:r>
+            <a:r>
+              <a:rPr lang="en-US" dirty="0">
+                <a:solidFill>
+                  <a:srgbClr val="700000"/>
+                </a:solidFill>
+              </a:rPr>
+              <a:t>Average Case</a:t>
+            </a:r>
+            <a:r>
+              <a:rPr lang="en-US" dirty="0"/>
+              <a:t>	</a:t>
+            </a:r>
+          </a:p>
+        </p:txBody>
+      </p:sp>
+      <p:sp>
+        <p:nvSpPr>
+          <p:cNvPr id="3" name="Content Placeholder 2">
+            <a:extLst>
+              <a:ext uri="{FF2B5EF4-FFF2-40B4-BE49-F238E27FC236}">
+                <a16:creationId xmlns:a16="http://schemas.microsoft.com/office/drawing/2014/main" id="{3503B70F-F5D7-F195-A180-95B7E54B36C7}"/>
+              </a:ext>
+            </a:extLst>
+          </p:cNvPr>
+          <p:cNvSpPr>
+            <a:spLocks noGrp="1"/>
+          </p:cNvSpPr>
+          <p:nvPr>
+            <p:ph sz="quarter" idx="1"/>
+          </p:nvPr>
+        </p:nvSpPr>
+        <p:spPr/>
+        <p:txBody>
+          <a:bodyPr/>
+          <a:lstStyle/>
+          <a:p>
+            <a:r>
+              <a:rPr lang="en-US" dirty="0"/>
+              <a:t>Step 0: Make assumption about distribution of inputs</a:t>
+            </a:r>
+          </a:p>
+          <a:p>
+            <a:endParaRPr lang="en-US" sz="800" dirty="0"/>
+          </a:p>
+          <a:p>
+            <a:r>
+              <a:rPr lang="en-US" dirty="0"/>
+              <a:t>Step 1: Determine the possible cases</a:t>
+            </a:r>
+          </a:p>
+          <a:p>
+            <a:endParaRPr lang="en-US" sz="800" dirty="0"/>
+          </a:p>
+          <a:p>
+            <a:r>
+              <a:rPr lang="en-US" dirty="0"/>
+              <a:t>Step 2: Determine the probability of each case</a:t>
+            </a:r>
+          </a:p>
+          <a:p>
+            <a:endParaRPr lang="en-US" sz="800" dirty="0"/>
+          </a:p>
+          <a:p>
+            <a:r>
+              <a:rPr lang="en-US" dirty="0"/>
+              <a:t>Step 3: Determine the time taken for each case</a:t>
+            </a:r>
+          </a:p>
+          <a:p>
+            <a:endParaRPr lang="en-US" sz="800" dirty="0"/>
+          </a:p>
+          <a:p>
+            <a:r>
+              <a:rPr lang="en-US" dirty="0"/>
+              <a:t>Step 4: Compute the expected time (average) , which is the sum of time for each case weighted by its probability </a:t>
+            </a:r>
+          </a:p>
+        </p:txBody>
+      </p:sp>
+    </p:spTree>
+    <p:extLst>
+      <p:ext uri="{BB962C8B-B14F-4D97-AF65-F5344CB8AC3E}">
+        <p14:creationId xmlns:p14="http://schemas.microsoft.com/office/powerpoint/2010/main" val="191985264"/>
+      </p:ext>
+    </p:extLst>
+  </p:cSld>
+  <p:clrMapOvr>
+    <a:masterClrMapping/>
+  </p:clrMapOvr>
+</p:sld>
+</file>
+
+<file path=ppt/slides/slide9.xml><?xml version="1.0" encoding="utf-8"?>
+<p:sld xmlns:a="http://schemas.openxmlformats.org/drawingml/2006/main" xmlns:r="http://schemas.openxmlformats.org/officeDocument/2006/relationships" xmlns:p="http://schemas.openxmlformats.org/presentationml/2006/main">
+  <p:cSld>
+    <p:spTree>
+      <p:nvGrpSpPr>
+        <p:cNvPr id="1" name=""/>
+        <p:cNvGrpSpPr/>
+        <p:nvPr/>
+      </p:nvGrpSpPr>
+      <p:grpSpPr>
+        <a:xfrm>
+          <a:off x="0" y="0"/>
+          <a:ext cx="0" cy="0"/>
+          <a:chOff x="0" y="0"/>
+          <a:chExt cx="0" cy="0"/>
+        </a:xfrm>
+      </p:grpSpPr>
+      <p:sp>
+        <p:nvSpPr>
+          <p:cNvPr id="2" name="Title 1">
+            <a:extLst>
+              <a:ext uri="{FF2B5EF4-FFF2-40B4-BE49-F238E27FC236}">
                 <a16:creationId xmlns:a16="http://schemas.microsoft.com/office/drawing/2014/main" id="{651457EC-C0F4-483A-A4BE-C74FC1D576DE}"/>
               </a:ext>
             </a:extLst>
@@ -22159,70 +22972,6 @@
       </p:par>
     </p:tnLst>
   </p:timing>
-</p:sld>
-</file>
-
-<file path=ppt/slides/slide9.xml><?xml version="1.0" encoding="utf-8"?>
-<p:sld xmlns:a="http://schemas.openxmlformats.org/drawingml/2006/main" xmlns:r="http://schemas.openxmlformats.org/officeDocument/2006/relationships" xmlns:p="http://schemas.openxmlformats.org/presentationml/2006/main">
-  <p:cSld>
-    <p:spTree>
-      <p:nvGrpSpPr>
-        <p:cNvPr id="1" name=""/>
-        <p:cNvGrpSpPr/>
-        <p:nvPr/>
-      </p:nvGrpSpPr>
-      <p:grpSpPr>
-        <a:xfrm>
-          <a:off x="0" y="0"/>
-          <a:ext cx="0" cy="0"/>
-          <a:chOff x="0" y="0"/>
-          <a:chExt cx="0" cy="0"/>
-        </a:xfrm>
-      </p:grpSpPr>
-      <p:sp>
-        <p:nvSpPr>
-          <p:cNvPr id="2" name="Title 1">
-            <a:extLst>
-              <a:ext uri="{FF2B5EF4-FFF2-40B4-BE49-F238E27FC236}">
-                <a16:creationId xmlns:a16="http://schemas.microsoft.com/office/drawing/2014/main" id="{764AD14C-6D94-4048-8030-AF3B00C6ADBA}"/>
-              </a:ext>
-            </a:extLst>
-          </p:cNvPr>
-          <p:cNvSpPr>
-            <a:spLocks noGrp="1"/>
-          </p:cNvSpPr>
-          <p:nvPr>
-            <p:ph type="title"/>
-          </p:nvPr>
-        </p:nvSpPr>
-        <p:spPr>
-          <a:xfrm>
-            <a:off x="1905000" y="2590800"/>
-            <a:ext cx="9220200" cy="990600"/>
-          </a:xfrm>
-        </p:spPr>
-        <p:txBody>
-          <a:bodyPr/>
-          <a:lstStyle/>
-          <a:p>
-            <a:pPr algn="ctr"/>
-            <a:r>
-              <a:rPr lang="en-US" dirty="0"/>
-              <a:t>Part B: Analyzing randomized algorithms</a:t>
-            </a:r>
-          </a:p>
-        </p:txBody>
-      </p:sp>
-    </p:spTree>
-    <p:extLst>
-      <p:ext uri="{BB962C8B-B14F-4D97-AF65-F5344CB8AC3E}">
-        <p14:creationId xmlns:p14="http://schemas.microsoft.com/office/powerpoint/2010/main" val="1929170631"/>
-      </p:ext>
-    </p:extLst>
-  </p:cSld>
-  <p:clrMapOvr>
-    <a:masterClrMapping/>
-  </p:clrMapOvr>
 </p:sld>
 </file>
 

--- a/materials/lectures/04-expected_time/slides.pptx
+++ b/materials/lectures/04-expected_time/slides.pptx
@@ -318,7 +318,7 @@
               <a:pPr>
                 <a:defRPr/>
               </a:pPr>
-              <a:t>1/12/2025</a:t>
+              <a:t>1/15/2025</a:t>
             </a:fld>
             <a:endParaRPr lang="en-US"/>
           </a:p>
@@ -1194,7 +1194,7 @@
               <a:pPr>
                 <a:defRPr/>
               </a:pPr>
-              <a:t>1/12/2025</a:t>
+              <a:t>1/15/2025</a:t>
             </a:fld>
             <a:endParaRPr lang="en-US"/>
           </a:p>
@@ -1438,7 +1438,7 @@
           <a:p>
             <a:fld id="{344494C4-6097-4BA9-B81C-8FE8D10E85BA}" type="datetimeFigureOut">
               <a:rPr lang="en-US" smtClean="0"/>
-              <a:t>1/12/2025</a:t>
+              <a:t>1/15/2025</a:t>
             </a:fld>
             <a:endParaRPr lang="en-US"/>
           </a:p>
@@ -1683,7 +1683,7 @@
           <a:p>
             <a:fld id="{344494C4-6097-4BA9-B81C-8FE8D10E85BA}" type="datetimeFigureOut">
               <a:rPr lang="en-US" smtClean="0"/>
-              <a:t>1/12/2025</a:t>
+              <a:t>1/15/2025</a:t>
             </a:fld>
             <a:endParaRPr lang="en-US"/>
           </a:p>
@@ -2063,7 +2063,7 @@
           <a:p>
             <a:fld id="{344494C4-6097-4BA9-B81C-8FE8D10E85BA}" type="datetimeFigureOut">
               <a:rPr lang="en-US" smtClean="0"/>
-              <a:t>1/12/2025</a:t>
+              <a:t>1/15/2025</a:t>
             </a:fld>
             <a:endParaRPr lang="en-US"/>
           </a:p>
@@ -2196,7 +2196,7 @@
           <a:p>
             <a:fld id="{344494C4-6097-4BA9-B81C-8FE8D10E85BA}" type="datetimeFigureOut">
               <a:rPr lang="en-US" smtClean="0"/>
-              <a:t>1/12/2025</a:t>
+              <a:t>1/15/2025</a:t>
             </a:fld>
             <a:endParaRPr lang="en-US"/>
           </a:p>
@@ -2307,7 +2307,7 @@
           <a:p>
             <a:fld id="{344494C4-6097-4BA9-B81C-8FE8D10E85BA}" type="datetimeFigureOut">
               <a:rPr lang="en-US" smtClean="0"/>
-              <a:t>1/12/2025</a:t>
+              <a:t>1/15/2025</a:t>
             </a:fld>
             <a:endParaRPr lang="en-US"/>
           </a:p>
@@ -2598,7 +2598,7 @@
           <a:p>
             <a:fld id="{344494C4-6097-4BA9-B81C-8FE8D10E85BA}" type="datetimeFigureOut">
               <a:rPr lang="en-US" smtClean="0"/>
-              <a:t>1/12/2025</a:t>
+              <a:t>1/15/2025</a:t>
             </a:fld>
             <a:endParaRPr lang="en-US"/>
           </a:p>
@@ -2866,7 +2866,7 @@
           <a:p>
             <a:fld id="{344494C4-6097-4BA9-B81C-8FE8D10E85BA}" type="datetimeFigureOut">
               <a:rPr lang="en-US" smtClean="0"/>
-              <a:t>1/12/2025</a:t>
+              <a:t>1/15/2025</a:t>
             </a:fld>
             <a:endParaRPr lang="en-US"/>
           </a:p>
@@ -3050,7 +3050,7 @@
           <a:p>
             <a:fld id="{344494C4-6097-4BA9-B81C-8FE8D10E85BA}" type="datetimeFigureOut">
               <a:rPr lang="en-US" smtClean="0"/>
-              <a:t>1/12/2025</a:t>
+              <a:t>1/15/2025</a:t>
             </a:fld>
             <a:endParaRPr lang="en-US"/>
           </a:p>
@@ -3244,7 +3244,7 @@
           <a:p>
             <a:fld id="{344494C4-6097-4BA9-B81C-8FE8D10E85BA}" type="datetimeFigureOut">
               <a:rPr lang="en-US" smtClean="0"/>
-              <a:t>1/12/2025</a:t>
+              <a:t>1/15/2025</a:t>
             </a:fld>
             <a:endParaRPr lang="en-US"/>
           </a:p>
@@ -3442,7 +3442,7 @@
           <a:p>
             <a:fld id="{7BF7D500-1223-4445-9EB2-2C72C770F9EB}" type="datetimeFigureOut">
               <a:rPr lang="en-US" smtClean="0"/>
-              <a:t>1/12/2025</a:t>
+              <a:t>1/15/2025</a:t>
             </a:fld>
             <a:endParaRPr lang="en-US"/>
           </a:p>
@@ -3625,7 +3625,7 @@
               <a:pPr>
                 <a:defRPr/>
               </a:pPr>
-              <a:t>1/12/2025</a:t>
+              <a:t>1/15/2025</a:t>
             </a:fld>
             <a:endParaRPr lang="en-US"/>
           </a:p>
@@ -3779,7 +3779,7 @@
           <a:p>
             <a:fld id="{7BF7D500-1223-4445-9EB2-2C72C770F9EB}" type="datetimeFigureOut">
               <a:rPr lang="en-US" smtClean="0"/>
-              <a:t>1/12/2025</a:t>
+              <a:t>1/15/2025</a:t>
             </a:fld>
             <a:endParaRPr lang="en-US"/>
           </a:p>
@@ -4024,7 +4024,7 @@
           <a:p>
             <a:fld id="{7BF7D500-1223-4445-9EB2-2C72C770F9EB}" type="datetimeFigureOut">
               <a:rPr lang="en-US" smtClean="0"/>
-              <a:t>1/12/2025</a:t>
+              <a:t>1/15/2025</a:t>
             </a:fld>
             <a:endParaRPr lang="en-US"/>
           </a:p>
@@ -4253,7 +4253,7 @@
           <a:p>
             <a:fld id="{7BF7D500-1223-4445-9EB2-2C72C770F9EB}" type="datetimeFigureOut">
               <a:rPr lang="en-US" smtClean="0"/>
-              <a:t>1/12/2025</a:t>
+              <a:t>1/15/2025</a:t>
             </a:fld>
             <a:endParaRPr lang="en-US"/>
           </a:p>
@@ -4617,7 +4617,7 @@
           <a:p>
             <a:fld id="{7BF7D500-1223-4445-9EB2-2C72C770F9EB}" type="datetimeFigureOut">
               <a:rPr lang="en-US" smtClean="0"/>
-              <a:t>1/12/2025</a:t>
+              <a:t>1/15/2025</a:t>
             </a:fld>
             <a:endParaRPr lang="en-US"/>
           </a:p>
@@ -4734,7 +4734,7 @@
           <a:p>
             <a:fld id="{7BF7D500-1223-4445-9EB2-2C72C770F9EB}" type="datetimeFigureOut">
               <a:rPr lang="en-US" smtClean="0"/>
-              <a:t>1/12/2025</a:t>
+              <a:t>1/15/2025</a:t>
             </a:fld>
             <a:endParaRPr lang="en-US"/>
           </a:p>
@@ -4829,7 +4829,7 @@
           <a:p>
             <a:fld id="{7BF7D500-1223-4445-9EB2-2C72C770F9EB}" type="datetimeFigureOut">
               <a:rPr lang="en-US" smtClean="0"/>
-              <a:t>1/12/2025</a:t>
+              <a:t>1/15/2025</a:t>
             </a:fld>
             <a:endParaRPr lang="en-US"/>
           </a:p>
@@ -5104,7 +5104,7 @@
           <a:p>
             <a:fld id="{7BF7D500-1223-4445-9EB2-2C72C770F9EB}" type="datetimeFigureOut">
               <a:rPr lang="en-US" smtClean="0"/>
-              <a:t>1/12/2025</a:t>
+              <a:t>1/15/2025</a:t>
             </a:fld>
             <a:endParaRPr lang="en-US"/>
           </a:p>
@@ -5356,7 +5356,7 @@
           <a:p>
             <a:fld id="{7BF7D500-1223-4445-9EB2-2C72C770F9EB}" type="datetimeFigureOut">
               <a:rPr lang="en-US" smtClean="0"/>
-              <a:t>1/12/2025</a:t>
+              <a:t>1/15/2025</a:t>
             </a:fld>
             <a:endParaRPr lang="en-US"/>
           </a:p>
@@ -5524,7 +5524,7 @@
           <a:p>
             <a:fld id="{7BF7D500-1223-4445-9EB2-2C72C770F9EB}" type="datetimeFigureOut">
               <a:rPr lang="en-US" smtClean="0"/>
-              <a:t>1/12/2025</a:t>
+              <a:t>1/15/2025</a:t>
             </a:fld>
             <a:endParaRPr lang="en-US"/>
           </a:p>
@@ -5702,7 +5702,7 @@
           <a:p>
             <a:fld id="{7BF7D500-1223-4445-9EB2-2C72C770F9EB}" type="datetimeFigureOut">
               <a:rPr lang="en-US" smtClean="0"/>
-              <a:t>1/12/2025</a:t>
+              <a:t>1/15/2025</a:t>
             </a:fld>
             <a:endParaRPr lang="en-US"/>
           </a:p>
@@ -5946,7 +5946,7 @@
               <a:pPr>
                 <a:defRPr/>
               </a:pPr>
-              <a:t>1/12/2025</a:t>
+              <a:t>1/15/2025</a:t>
             </a:fld>
             <a:endParaRPr lang="en-US"/>
           </a:p>
@@ -6296,7 +6296,7 @@
               <a:pPr>
                 <a:defRPr/>
               </a:pPr>
-              <a:t>1/12/2025</a:t>
+              <a:t>1/15/2025</a:t>
             </a:fld>
             <a:endParaRPr lang="en-US"/>
           </a:p>
@@ -6460,7 +6460,7 @@
               <a:pPr>
                 <a:defRPr/>
               </a:pPr>
-              <a:t>1/12/2025</a:t>
+              <a:t>1/15/2025</a:t>
             </a:fld>
             <a:endParaRPr lang="en-US"/>
           </a:p>
@@ -6551,7 +6551,7 @@
               <a:pPr>
                 <a:defRPr/>
               </a:pPr>
-              <a:t>1/12/2025</a:t>
+              <a:t>1/15/2025</a:t>
             </a:fld>
             <a:endParaRPr lang="en-US"/>
           </a:p>
@@ -6660,7 +6660,7 @@
               <a:pPr>
                 <a:defRPr/>
               </a:pPr>
-              <a:t>1/12/2025</a:t>
+              <a:t>1/15/2025</a:t>
             </a:fld>
             <a:endParaRPr lang="en-US"/>
           </a:p>
@@ -6845,7 +6845,7 @@
           <a:p>
             <a:fld id="{344494C4-6097-4BA9-B81C-8FE8D10E85BA}" type="datetimeFigureOut">
               <a:rPr lang="en-US" smtClean="0"/>
-              <a:t>1/12/2025</a:t>
+              <a:t>1/15/2025</a:t>
             </a:fld>
             <a:endParaRPr lang="en-US"/>
           </a:p>
@@ -7029,7 +7029,7 @@
           <a:p>
             <a:fld id="{344494C4-6097-4BA9-B81C-8FE8D10E85BA}" type="datetimeFigureOut">
               <a:rPr lang="en-US" smtClean="0"/>
-              <a:t>1/12/2025</a:t>
+              <a:t>1/15/2025</a:t>
             </a:fld>
             <a:endParaRPr lang="en-US"/>
           </a:p>
@@ -7278,7 +7278,7 @@
               <a:pPr>
                 <a:defRPr/>
               </a:pPr>
-              <a:t>1/12/2025</a:t>
+              <a:t>1/15/2025</a:t>
             </a:fld>
             <a:endParaRPr lang="en-US"/>
           </a:p>
@@ -8532,7 +8532,7 @@
           <a:p>
             <a:fld id="{7BF7D500-1223-4445-9EB2-2C72C770F9EB}" type="datetimeFigureOut">
               <a:rPr lang="en-US" smtClean="0"/>
-              <a:t>1/12/2025</a:t>
+              <a:t>1/15/2025</a:t>
             </a:fld>
             <a:endParaRPr lang="en-US"/>
           </a:p>
@@ -11860,8 +11860,8 @@
           </a:p>
         </p:txBody>
       </p:sp>
-      <mc:AlternateContent xmlns:mc="http://schemas.openxmlformats.org/markup-compatibility/2006">
-        <mc:Choice xmlns:a14="http://schemas.microsoft.com/office/drawing/2010/main" Requires="a14">
+      <mc:AlternateContent xmlns:mc="http://schemas.openxmlformats.org/markup-compatibility/2006" xmlns:a14="http://schemas.microsoft.com/office/drawing/2010/main">
+        <mc:Choice Requires="a14">
           <p:sp>
             <p:nvSpPr>
               <p:cNvPr id="3" name="Content Placeholder 2">
@@ -12242,7 +12242,7 @@
             </p:txBody>
           </p:sp>
         </mc:Choice>
-        <mc:Fallback>
+        <mc:Fallback xmlns="">
           <p:sp>
             <p:nvSpPr>
               <p:cNvPr id="3" name="Content Placeholder 2">
@@ -17925,7 +17925,7 @@
           <a:p>
             <a:r>
               <a:rPr lang="en-US" dirty="0"/>
-              <a:t>No algorithm can have a better (worst case) time complexity than a </a:t>
+              <a:t>No algorithm can have a faster (worst case) time complexity than a </a:t>
             </a:r>
             <a:r>
               <a:rPr lang="en-US" dirty="0">
@@ -18962,8 +18962,8 @@
           </a:p>
         </p:txBody>
       </p:sp>
-      <mc:AlternateContent xmlns:mc="http://schemas.openxmlformats.org/markup-compatibility/2006" xmlns:a14="http://schemas.microsoft.com/office/drawing/2010/main">
-        <mc:Choice Requires="a14">
+      <mc:AlternateContent xmlns:mc="http://schemas.openxmlformats.org/markup-compatibility/2006">
+        <mc:Choice xmlns:a14="http://schemas.microsoft.com/office/drawing/2010/main" Requires="a14">
           <p:sp>
             <p:nvSpPr>
               <p:cNvPr id="3" name="Content Placeholder 2">
@@ -18983,7 +18983,7 @@
             <p:spPr>
               <a:xfrm>
                 <a:off x="609600" y="1219200"/>
-                <a:ext cx="9601200" cy="4724400"/>
+                <a:ext cx="10058400" cy="4724400"/>
               </a:xfrm>
             </p:spPr>
             <p:txBody>
@@ -18991,13 +18991,13 @@
               <a:lstStyle/>
               <a:p>
                 <a:r>
-                  <a:rPr lang="en-US" dirty="0"/>
+                  <a:rPr lang="en-US" sz="2500" dirty="0"/>
                   <a:t>A lower-bound </a:t>
                 </a:r>
                 <a14:m>
                   <m:oMath xmlns:m="http://schemas.openxmlformats.org/officeDocument/2006/math">
                     <m:r>
-                      <a:rPr lang="en-US" b="0" i="1" smtClean="0">
+                      <a:rPr lang="en-US" sz="2500" b="0" i="1" smtClean="0">
                         <a:latin typeface="Cambria Math" panose="02040503050406030204" pitchFamily="18" charset="0"/>
                       </a:rPr>
                       <m:t>𝑓</m:t>
@@ -19005,14 +19005,14 @@
                     <m:d>
                       <m:dPr>
                         <m:ctrlPr>
-                          <a:rPr lang="en-US" b="0" i="1" smtClean="0">
+                          <a:rPr lang="en-US" sz="2500" b="0" i="1" smtClean="0">
                             <a:latin typeface="Cambria Math" panose="02040503050406030204" pitchFamily="18" charset="0"/>
                           </a:rPr>
                         </m:ctrlPr>
                       </m:dPr>
                       <m:e>
                         <m:r>
-                          <a:rPr lang="en-US" b="0" i="1" smtClean="0">
+                          <a:rPr lang="en-US" sz="2500" b="0" i="1" smtClean="0">
                             <a:latin typeface="Cambria Math" panose="02040503050406030204" pitchFamily="18" charset="0"/>
                           </a:rPr>
                           <m:t>𝑛</m:t>
@@ -19022,11 +19022,11 @@
                   </m:oMath>
                 </a14:m>
                 <a:r>
-                  <a:rPr lang="en-US" dirty="0"/>
+                  <a:rPr lang="en-US" sz="2500" dirty="0"/>
                   <a:t> for problem-P is </a:t>
                 </a:r>
                 <a:r>
-                  <a:rPr lang="en-US" dirty="0">
+                  <a:rPr lang="en-US" sz="2500" dirty="0">
                     <a:solidFill>
                       <a:srgbClr val="700000"/>
                     </a:solidFill>
@@ -19034,8 +19034,20 @@
                   <a:t>tight</a:t>
                 </a:r>
                 <a:r>
-                  <a:rPr lang="en-US" dirty="0"/>
-                  <a:t> if there exists an algorithm for problem-P whose worst-case running time is </a:t>
+                  <a:rPr lang="en-US" sz="2500" dirty="0"/>
+                  <a:t> if there exists an algorithm </a:t>
+                </a:r>
+                <a:r>
+                  <a:rPr lang="en-US" sz="2500" dirty="0">
+                    <a:solidFill>
+                      <a:srgbClr val="0070C0"/>
+                    </a:solidFill>
+                  </a:rPr>
+                  <a:t>A</a:t>
+                </a:r>
+                <a:r>
+                  <a:rPr lang="en-US" sz="2500" dirty="0"/>
+                  <a:t> for problem-P whose worst-case running time is </a:t>
                 </a:r>
                 <a14:m>
                   <m:oMath xmlns:m="http://schemas.openxmlformats.org/officeDocument/2006/math">
@@ -19043,19 +19055,19 @@
                       <m:rPr>
                         <m:sty m:val="p"/>
                       </m:rPr>
-                      <a:rPr lang="en-US" b="0" i="0" smtClean="0">
+                      <a:rPr lang="en-US" sz="2500" b="0" i="0" smtClean="0">
                         <a:latin typeface="Cambria Math" panose="02040503050406030204" pitchFamily="18" charset="0"/>
                       </a:rPr>
                       <m:t>Θ</m:t>
                     </m:r>
                     <m:r>
-                      <a:rPr lang="en-US" b="0" i="1" smtClean="0">
+                      <a:rPr lang="en-US" sz="2500" b="0" i="1" smtClean="0">
                         <a:latin typeface="Cambria Math" panose="02040503050406030204" pitchFamily="18" charset="0"/>
                       </a:rPr>
                       <m:t>(</m:t>
                     </m:r>
                     <m:r>
-                      <a:rPr lang="en-US" b="0" i="1" smtClean="0">
+                      <a:rPr lang="en-US" sz="2500" b="0" i="1" smtClean="0">
                         <a:latin typeface="Cambria Math" panose="02040503050406030204" pitchFamily="18" charset="0"/>
                       </a:rPr>
                       <m:t>𝑓</m:t>
@@ -19063,14 +19075,14 @@
                     <m:d>
                       <m:dPr>
                         <m:ctrlPr>
-                          <a:rPr lang="en-US" b="0" i="1" smtClean="0">
+                          <a:rPr lang="en-US" sz="2500" b="0" i="1" smtClean="0">
                             <a:latin typeface="Cambria Math" panose="02040503050406030204" pitchFamily="18" charset="0"/>
                           </a:rPr>
                         </m:ctrlPr>
                       </m:dPr>
                       <m:e>
                         <m:r>
-                          <a:rPr lang="en-US" b="0" i="1" smtClean="0">
+                          <a:rPr lang="en-US" sz="2500" b="0" i="1" smtClean="0">
                             <a:latin typeface="Cambria Math" panose="02040503050406030204" pitchFamily="18" charset="0"/>
                           </a:rPr>
                           <m:t>𝑛</m:t>
@@ -19078,7 +19090,7 @@
                       </m:e>
                     </m:d>
                     <m:r>
-                      <a:rPr lang="en-US" b="0" i="1" smtClean="0">
+                      <a:rPr lang="en-US" sz="2500" b="0" i="1" smtClean="0">
                         <a:latin typeface="Cambria Math" panose="02040503050406030204" pitchFamily="18" charset="0"/>
                       </a:rPr>
                       <m:t>)</m:t>
@@ -19086,7 +19098,7 @@
                   </m:oMath>
                 </a14:m>
                 <a:r>
-                  <a:rPr lang="en-US" dirty="0"/>
+                  <a:rPr lang="en-US" sz="2500" dirty="0"/>
                   <a:t>.  </a:t>
                 </a:r>
               </a:p>
@@ -19094,7 +19106,19 @@
                 <a:pPr lvl="1"/>
                 <a:r>
                   <a:rPr lang="en-US" dirty="0"/>
-                  <a:t>In some sense, this algorithm has </a:t>
+                  <a:t>In some sense, the algorithm </a:t>
+                </a:r>
+                <a:r>
+                  <a:rPr lang="en-US" dirty="0">
+                    <a:solidFill>
+                      <a:srgbClr val="0070C0"/>
+                    </a:solidFill>
+                  </a:rPr>
+                  <a:t>A</a:t>
+                </a:r>
+                <a:r>
+                  <a:rPr lang="en-US" dirty="0"/>
+                  <a:t> has </a:t>
                 </a:r>
                 <a:r>
                   <a:rPr lang="en-US" dirty="0">
@@ -19106,7 +19130,7 @@
                 </a:r>
                 <a:r>
                   <a:rPr lang="en-US" dirty="0"/>
-                  <a:t> running time. </a:t>
+                  <a:t> running time.  </a:t>
                 </a:r>
               </a:p>
               <a:p>
@@ -19251,7 +19275,19 @@
                 </a14:m>
                 <a:r>
                   <a:rPr lang="en-US" dirty="0"/>
-                  <a:t>is tight </a:t>
+                  <a:t>is </a:t>
+                </a:r>
+                <a:r>
+                  <a:rPr lang="en-US" b="1" dirty="0">
+                    <a:solidFill>
+                      <a:srgbClr val="700000"/>
+                    </a:solidFill>
+                  </a:rPr>
+                  <a:t>tight</a:t>
+                </a:r>
+                <a:r>
+                  <a:rPr lang="en-US" dirty="0"/>
+                  <a:t> </a:t>
                 </a:r>
               </a:p>
               <a:p>
@@ -19261,7 +19297,7 @@
             </p:txBody>
           </p:sp>
         </mc:Choice>
-        <mc:Fallback xmlns="">
+        <mc:Fallback>
           <p:sp>
             <p:nvSpPr>
               <p:cNvPr id="3" name="Content Placeholder 2">
@@ -19281,12 +19317,12 @@
             <p:spPr>
               <a:xfrm>
                 <a:off x="609600" y="1219200"/>
-                <a:ext cx="9601200" cy="4724400"/>
+                <a:ext cx="10058400" cy="4724400"/>
               </a:xfrm>
               <a:blipFill>
                 <a:blip r:embed="rId2"/>
                 <a:stretch>
-                  <a:fillRect l="-571" t="-1161" r="-2667"/>
+                  <a:fillRect l="-545" t="-1032"/>
                 </a:stretch>
               </a:blipFill>
             </p:spPr>
@@ -19917,148 +19953,6 @@
                                         </p:cTn>
                                         <p:tgtEl>
                                           <p:spTgt spid="4"/>
-                                        </p:tgtEl>
-                                        <p:attrNameLst>
-                                          <p:attrName>style.visibility</p:attrName>
-                                        </p:attrNameLst>
-                                      </p:cBhvr>
-                                      <p:to>
-                                        <p:strVal val="visible"/>
-                                      </p:to>
-                                    </p:set>
-                                  </p:childTnLst>
-                                </p:cTn>
-                              </p:par>
-                            </p:childTnLst>
-                          </p:cTn>
-                        </p:par>
-                      </p:childTnLst>
-                    </p:cTn>
-                  </p:par>
-                  <p:par>
-                    <p:cTn id="7" fill="hold">
-                      <p:stCondLst>
-                        <p:cond delay="indefinite"/>
-                      </p:stCondLst>
-                      <p:childTnLst>
-                        <p:par>
-                          <p:cTn id="8" fill="hold">
-                            <p:stCondLst>
-                              <p:cond delay="0"/>
-                            </p:stCondLst>
-                            <p:childTnLst>
-                              <p:par>
-                                <p:cTn id="9" presetID="1" presetClass="entr" presetSubtype="0" fill="hold" nodeType="clickEffect">
-                                  <p:stCondLst>
-                                    <p:cond delay="0"/>
-                                  </p:stCondLst>
-                                  <p:childTnLst>
-                                    <p:set>
-                                      <p:cBhvr>
-                                        <p:cTn id="10" dur="1" fill="hold">
-                                          <p:stCondLst>
-                                            <p:cond delay="0"/>
-                                          </p:stCondLst>
-                                        </p:cTn>
-                                        <p:tgtEl>
-                                          <p:spTgt spid="3">
-                                            <p:txEl>
-                                              <p:pRg st="4" end="4"/>
-                                            </p:txEl>
-                                          </p:spTgt>
-                                        </p:tgtEl>
-                                        <p:attrNameLst>
-                                          <p:attrName>style.visibility</p:attrName>
-                                        </p:attrNameLst>
-                                      </p:cBhvr>
-                                      <p:to>
-                                        <p:strVal val="visible"/>
-                                      </p:to>
-                                    </p:set>
-                                  </p:childTnLst>
-                                </p:cTn>
-                              </p:par>
-                              <p:par>
-                                <p:cTn id="11" presetID="1" presetClass="entr" presetSubtype="0" fill="hold" nodeType="withEffect">
-                                  <p:stCondLst>
-                                    <p:cond delay="0"/>
-                                  </p:stCondLst>
-                                  <p:childTnLst>
-                                    <p:set>
-                                      <p:cBhvr>
-                                        <p:cTn id="12" dur="1" fill="hold">
-                                          <p:stCondLst>
-                                            <p:cond delay="0"/>
-                                          </p:stCondLst>
-                                        </p:cTn>
-                                        <p:tgtEl>
-                                          <p:spTgt spid="3">
-                                            <p:txEl>
-                                              <p:pRg st="5" end="5"/>
-                                            </p:txEl>
-                                          </p:spTgt>
-                                        </p:tgtEl>
-                                        <p:attrNameLst>
-                                          <p:attrName>style.visibility</p:attrName>
-                                        </p:attrNameLst>
-                                      </p:cBhvr>
-                                      <p:to>
-                                        <p:strVal val="visible"/>
-                                      </p:to>
-                                    </p:set>
-                                  </p:childTnLst>
-                                </p:cTn>
-                              </p:par>
-                              <p:par>
-                                <p:cTn id="13" presetID="1" presetClass="entr" presetSubtype="0" fill="hold" nodeType="withEffect">
-                                  <p:stCondLst>
-                                    <p:cond delay="0"/>
-                                  </p:stCondLst>
-                                  <p:childTnLst>
-                                    <p:set>
-                                      <p:cBhvr>
-                                        <p:cTn id="14" dur="1" fill="hold">
-                                          <p:stCondLst>
-                                            <p:cond delay="0"/>
-                                          </p:stCondLst>
-                                        </p:cTn>
-                                        <p:tgtEl>
-                                          <p:spTgt spid="3">
-                                            <p:txEl>
-                                              <p:pRg st="7" end="7"/>
-                                            </p:txEl>
-                                          </p:spTgt>
-                                        </p:tgtEl>
-                                        <p:attrNameLst>
-                                          <p:attrName>style.visibility</p:attrName>
-                                        </p:attrNameLst>
-                                      </p:cBhvr>
-                                      <p:to>
-                                        <p:strVal val="visible"/>
-                                      </p:to>
-                                    </p:set>
-                                  </p:childTnLst>
-                                </p:cTn>
-                              </p:par>
-                              <p:par>
-                                <p:cTn id="15" presetID="1" presetClass="entr" presetSubtype="0" fill="hold" nodeType="withEffect">
-                                  <p:stCondLst>
-                                    <p:cond delay="0"/>
-                                  </p:stCondLst>
-                                  <p:childTnLst>
-                                    <p:set>
-                                      <p:cBhvr>
-                                        <p:cTn id="16" dur="1" fill="hold">
-                                          <p:stCondLst>
-                                            <p:cond delay="0"/>
-                                          </p:stCondLst>
-                                        </p:cTn>
-                                        <p:tgtEl>
-                                          <p:spTgt spid="3">
-                                            <p:txEl>
-                                              <p:pRg st="8" end="8"/>
-                                            </p:txEl>
-                                          </p:spTgt>
                                         </p:tgtEl>
                                         <p:attrNameLst>
                                           <p:attrName>style.visibility</p:attrName>
